--- a/pitch/Overself-路演.pptx
+++ b/pitch/Overself-路演.pptx
@@ -2188,7 +2188,7 @@
                 <a:ea typeface="PingFang SC" pitchFamily="34" charset="-122"/>
                 <a:cs typeface="PingFang SC" pitchFamily="34" charset="-120"/>
               </a:rPr>
-              <a:t>MBTI 性格补全游戏</a:t>
+              <a:t>MBTI 性格解锁游戏</a:t>
             </a:r>
             <a:endParaRPr lang="en-US" sz="2600" dirty="0"/>
           </a:p>
@@ -2227,7 +2227,7 @@
                 <a:ea typeface="PingFang SC" pitchFamily="34" charset="-122"/>
                 <a:cs typeface="PingFang SC" pitchFamily="34" charset="-120"/>
               </a:rPr>
-              <a:t>测出你的 MBTI，体验另一面，补全你自己。</a:t>
+              <a:t>测出你的 MBTI，体验另一面，解锁另一个你。</a:t>
             </a:r>
             <a:endParaRPr lang="en-US" sz="1500" dirty="0"/>
           </a:p>
@@ -3506,7 +3506,7 @@
                 <a:ea typeface="PingFang SC" pitchFamily="34" charset="-122"/>
                 <a:cs typeface="PingFang SC" pitchFamily="34" charset="-120"/>
               </a:rPr>
-              <a:t>首页：测 → 体验 → 补全、T 与 F、三个故事</a:t>
+              <a:t>首页：测 → 体验 → 解锁、T 与 F、三个故事</a:t>
             </a:r>
             <a:endParaRPr lang="en-US" sz="1000" dirty="0"/>
           </a:p>
@@ -3800,7 +3800,7 @@
                 <a:ea typeface="PingFang SC" pitchFamily="34" charset="-122"/>
                 <a:cs typeface="PingFang SC" pitchFamily="34" charset="-120"/>
               </a:rPr>
-              <a:t>补全路线图</a:t>
+              <a:t>解锁路线图</a:t>
             </a:r>
             <a:endParaRPr lang="en-US" sz="1100" dirty="0"/>
           </a:p>
@@ -3839,7 +3839,7 @@
                 <a:ea typeface="PingFang SC" pitchFamily="34" charset="-122"/>
                 <a:cs typeface="PingFang SC" pitchFamily="34" charset="-120"/>
               </a:rPr>
-              <a:t>T/F 只是第一组，四个维度都要补全</a:t>
+              <a:t>T/F 只是第一组，四个维度都要解锁</a:t>
             </a:r>
             <a:endParaRPr lang="en-US" sz="2600" dirty="0"/>
           </a:p>
@@ -3959,7 +3959,7 @@
                           <a:ea typeface="PingFang SC" pitchFamily="34" charset="-122"/>
                           <a:cs typeface="PingFang SC" pitchFamily="34" charset="-120"/>
                         </a:rPr>
-                        <a:t>这一边补全…</a:t>
+                        <a:t>这一边解锁…</a:t>
                       </a:r>
                       <a:endParaRPr lang="en-US" sz="1250" dirty="0">
                         <a:latin typeface="PingFang SC" charset="0"/>
@@ -4027,7 +4027,7 @@
                           <a:ea typeface="PingFang SC" pitchFamily="34" charset="-122"/>
                           <a:cs typeface="PingFang SC" pitchFamily="34" charset="-120"/>
                         </a:rPr>
-                        <a:t>那一边补全…</a:t>
+                        <a:t>那一边解锁…</a:t>
                       </a:r>
                       <a:endParaRPr lang="en-US" sz="1250" dirty="0">
                         <a:latin typeface="PingFang SC" charset="0"/>
@@ -4233,7 +4233,7 @@
                           <a:ea typeface="PingFang SC" pitchFamily="34" charset="-122"/>
                           <a:cs typeface="PingFang SC" pitchFamily="34" charset="-120"/>
                         </a:rPr>
-                        <a:t>T 补全 F · 读懂人心</a:t>
+                        <a:t>T 解锁 F · 读懂人心</a:t>
                       </a:r>
                       <a:endParaRPr lang="en-US" sz="1250" dirty="0">
                         <a:latin typeface="PingFang SC" charset="0"/>
@@ -4301,7 +4301,7 @@
                           <a:ea typeface="PingFang SC" pitchFamily="34" charset="-122"/>
                           <a:cs typeface="PingFang SC" pitchFamily="34" charset="-120"/>
                         </a:rPr>
-                        <a:t>F 补全 T · 冷静解题</a:t>
+                        <a:t>F 解锁 T · 冷静解题</a:t>
                       </a:r>
                       <a:endParaRPr lang="en-US" sz="1250" dirty="0">
                         <a:latin typeface="PingFang SC" charset="0"/>
@@ -4507,7 +4507,7 @@
                           <a:ea typeface="PingFang SC" pitchFamily="34" charset="-122"/>
                           <a:cs typeface="PingFang SC" pitchFamily="34" charset="-120"/>
                         </a:rPr>
-                        <a:t>E 补全 I · 安静地听</a:t>
+                        <a:t>E 解锁 I · 安静地听</a:t>
                       </a:r>
                       <a:endParaRPr lang="en-US" sz="1250" dirty="0">
                         <a:latin typeface="PingFang SC" charset="0"/>
@@ -4575,7 +4575,7 @@
                           <a:ea typeface="PingFang SC" pitchFamily="34" charset="-122"/>
                           <a:cs typeface="PingFang SC" pitchFamily="34" charset="-120"/>
                         </a:rPr>
-                        <a:t>I 补全 E · 迈出第一句</a:t>
+                        <a:t>I 解锁 E · 迈出第一句</a:t>
                       </a:r>
                       <a:endParaRPr lang="en-US" sz="1250" dirty="0">
                         <a:latin typeface="PingFang SC" charset="0"/>
@@ -4781,7 +4781,7 @@
                           <a:ea typeface="PingFang SC" pitchFamily="34" charset="-122"/>
                           <a:cs typeface="PingFang SC" pitchFamily="34" charset="-120"/>
                         </a:rPr>
-                        <a:t>J 补全 P · 拥抱计划外</a:t>
+                        <a:t>J 解锁 P · 拥抱计划外</a:t>
                       </a:r>
                       <a:endParaRPr lang="en-US" sz="1250" dirty="0">
                         <a:latin typeface="PingFang SC" charset="0"/>
@@ -4849,7 +4849,7 @@
                           <a:ea typeface="PingFang SC" pitchFamily="34" charset="-122"/>
                           <a:cs typeface="PingFang SC" pitchFamily="34" charset="-120"/>
                         </a:rPr>
-                        <a:t>P 补全 J · 学会做计划</a:t>
+                        <a:t>P 解锁 J · 学会做计划</a:t>
                       </a:r>
                       <a:endParaRPr lang="en-US" sz="1250" dirty="0">
                         <a:latin typeface="PingFang SC" charset="0"/>
@@ -5055,7 +5055,7 @@
                           <a:ea typeface="PingFang SC" pitchFamily="34" charset="-122"/>
                           <a:cs typeface="PingFang SC" pitchFamily="34" charset="-120"/>
                         </a:rPr>
-                        <a:t>S 补全 N · 看见可能性</a:t>
+                        <a:t>S 解锁 N · 看见可能性</a:t>
                       </a:r>
                       <a:endParaRPr lang="en-US" sz="1250" dirty="0">
                         <a:latin typeface="PingFang SC" charset="0"/>
@@ -5123,7 +5123,7 @@
                           <a:ea typeface="PingFang SC" pitchFamily="34" charset="-122"/>
                           <a:cs typeface="PingFang SC" pitchFamily="34" charset="-120"/>
                         </a:rPr>
-                        <a:t>N 补全 S · 落到细节</a:t>
+                        <a:t>N 解锁 S · 落到细节</a:t>
                       </a:r>
                       <a:endParaRPr lang="en-US" sz="1250" dirty="0">
                         <a:latin typeface="PingFang SC" charset="0"/>
@@ -5280,7 +5280,7 @@
                 <a:ea typeface="PingFang SC" pitchFamily="34" charset="-122"/>
                 <a:cs typeface="PingFang SC" pitchFamily="34" charset="-120"/>
               </a:rPr>
-              <a:t>每一维都用同一套方法：找到两边各自「那一刻」的卡点 → 写一个双视角故事 → 配一组 3 分钟日常练习。测试结果页已经给出另外三维的补全方向。</a:t>
+              <a:t>每一维都用同一套方法：找到两边各自「那一刻」的卡点 → 写一个双视角故事 → 配一组 3 分钟日常练习。测试结果页已经给出另外三维的解锁方向。</a:t>
             </a:r>
             <a:endParaRPr lang="en-US" sz="1200" dirty="0"/>
           </a:p>
@@ -6121,7 +6121,7 @@
                 <a:ea typeface="PingFang SC" pitchFamily="34" charset="-122"/>
                 <a:cs typeface="PingFang SC" pitchFamily="34" charset="-120"/>
               </a:rPr>
-              <a:t>E/I 补全故事</a:t>
+              <a:t>E/I 解锁故事</a:t>
             </a:r>
             <a:endParaRPr lang="en-US" sz="1100" dirty="0"/>
           </a:p>
@@ -6418,7 +6418,7 @@
                 <a:ea typeface="PingFang SC" pitchFamily="34" charset="-122"/>
                 <a:cs typeface="PingFang SC" pitchFamily="34" charset="-120"/>
               </a:rPr>
-              <a:t>Overself · MBTI 性格补全游戏</a:t>
+              <a:t>Overself · MBTI 性格解锁游戏</a:t>
             </a:r>
             <a:endParaRPr lang="en-US" sz="1400" dirty="0"/>
           </a:p>
@@ -7790,7 +7790,7 @@
                 <a:ea typeface="PingFang SC" pitchFamily="34" charset="-122"/>
                 <a:cs typeface="PingFang SC" pitchFamily="34" charset="-120"/>
               </a:rPr>
-              <a:t>三步：测 → 体验 → 补全</a:t>
+              <a:t>三步：测 → 体验 → 解锁</a:t>
             </a:r>
             <a:endParaRPr lang="en-US" sz="2600" dirty="0"/>
           </a:p>
@@ -7996,7 +7996,7 @@
                 <a:ea typeface="PingFang SC" pitchFamily="34" charset="-122"/>
                 <a:cs typeface="PingFang SC" pitchFamily="34" charset="-120"/>
               </a:rPr>
-              <a:t>22 道情境题，得到四个字母、每一维的偏向，以及你的补全方向和最像你的角色</a:t>
+              <a:t>22 道情境题，得到四个字母、每一维的偏向，以及你的解锁方向和最像你的角色</a:t>
             </a:r>
             <a:endParaRPr lang="en-US" sz="1150" dirty="0"/>
           </a:p>
@@ -8291,7 +8291,7 @@
                 <a:ea typeface="PingFang SC" pitchFamily="34" charset="-122"/>
                 <a:cs typeface="PingFang SC" pitchFamily="34" charset="-120"/>
               </a:rPr>
-              <a:t>补</a:t>
+              <a:t>解</a:t>
             </a:r>
             <a:endParaRPr lang="en-US" sz="2400" dirty="0"/>
           </a:p>
@@ -8330,7 +8330,7 @@
                 <a:ea typeface="PingFang SC" pitchFamily="34" charset="-122"/>
                 <a:cs typeface="PingFang SC" pitchFamily="34" charset="-120"/>
               </a:rPr>
-              <a:t>补全你自己</a:t>
+              <a:t>解锁另一个你</a:t>
             </a:r>
             <a:endParaRPr lang="en-US" sz="1700" dirty="0"/>
           </a:p>
@@ -8408,7 +8408,7 @@
                 <a:ea typeface="PingFang SC" pitchFamily="34" charset="-122"/>
                 <a:cs typeface="PingFang SC" pitchFamily="34" charset="-120"/>
               </a:rPr>
-              <a:t>补全不是把 T 变成 F，而是让你在需要的时候，也能用上另一面。Overself = 越过习惯的自己。</a:t>
+              <a:t>解锁不是把 T 变成 F：另一面本来就在你身上，只是还没打开。Overself = 越过习惯的自己。</a:t>
             </a:r>
             <a:endParaRPr lang="en-US" sz="1300" dirty="0"/>
           </a:p>
@@ -8607,7 +8607,7 @@
                 <a:ea typeface="PingFang SC" pitchFamily="34" charset="-122"/>
                 <a:cs typeface="PingFang SC" pitchFamily="34" charset="-120"/>
               </a:rPr>
-              <a:t>测完不是结束，而是给你一个补全方向</a:t>
+              <a:t>测完不是结束，而是给你一个解锁方向</a:t>
             </a:r>
             <a:endParaRPr lang="en-US" sz="2600" dirty="0"/>
           </a:p>
@@ -8738,7 +8738,7 @@
                 <a:ea typeface="PingFang SC" pitchFamily="34" charset="-122"/>
                 <a:cs typeface="PingFang SC" pitchFamily="34" charset="-120"/>
               </a:rPr>
-              <a:t>你的补全方向</a:t>
+              <a:t>你的解锁方向</a:t>
             </a:r>
             <a:pPr indent="0" marL="0">
               <a:lnSpc>
@@ -8758,7 +8758,7 @@
                 <a:ea typeface="PingFang SC" pitchFamily="34" charset="-122"/>
                 <a:cs typeface="PingFang SC" pitchFamily="34" charset="-120"/>
               </a:rPr>
-              <a:t>：T → 补全 F「读懂人心」；F → 补全 T「冷静解题」</a:t>
+              <a:t>：T → 解锁 F「读懂人心」；F → 解锁 T「冷静解题」</a:t>
             </a:r>
             <a:endParaRPr lang="en-US" sz="1250" dirty="0"/>
           </a:p>
@@ -8844,7 +8844,7 @@
                 <a:ea typeface="PingFang SC" pitchFamily="34" charset="-122"/>
                 <a:cs typeface="PingFang SC" pitchFamily="34" charset="-120"/>
               </a:rPr>
-              <a:t>：E/I、S/N、J/P 的补全方向一并给出（即将上线）</a:t>
+              <a:t>：E/I、S/N、J/P 的解锁方向一并给出（即将上线）</a:t>
             </a:r>
             <a:endParaRPr lang="en-US" sz="1250" dirty="0"/>
           </a:p>
@@ -8939,7 +8939,7 @@
                 <a:ea typeface="PingFang SC" pitchFamily="34" charset="-122"/>
                 <a:cs typeface="PingFang SC" pitchFamily="34" charset="-120"/>
               </a:rPr>
-              <a:t>测试结果页：类型、维度、补全方向、推荐角色</a:t>
+              <a:t>测试结果页：类型、维度、解锁方向、推荐角色</a:t>
             </a:r>
             <a:endParaRPr lang="en-US" sz="1000" dirty="0"/>
           </a:p>
@@ -9099,7 +9099,7 @@
                 <a:ea typeface="PingFang SC" pitchFamily="34" charset="-122"/>
                 <a:cs typeface="PingFang SC" pitchFamily="34" charset="-120"/>
               </a:rPr>
-              <a:t>第一组补全</a:t>
+              <a:t>第一组解锁</a:t>
             </a:r>
             <a:endParaRPr lang="en-US" sz="1100" dirty="0"/>
           </a:p>
@@ -9361,7 +9361,7 @@
                 <a:ea typeface="PingFang SC" pitchFamily="34" charset="-122"/>
                 <a:cs typeface="PingFang SC" pitchFamily="34" charset="-120"/>
               </a:rPr>
-              <a:t>→ 补全 F · 读懂人心</a:t>
+              <a:t>→ 解锁 F · 读懂人心</a:t>
             </a:r>
             <a:endParaRPr lang="en-US" sz="1200" dirty="0"/>
           </a:p>
@@ -9584,7 +9584,7 @@
                 <a:ea typeface="PingFang SC" pitchFamily="34" charset="-122"/>
                 <a:cs typeface="PingFang SC" pitchFamily="34" charset="-120"/>
               </a:rPr>
-              <a:t>→ 补全 T · 冷静解题</a:t>
+              <a:t>→ 解锁 T · 冷静解题</a:t>
             </a:r>
             <a:endParaRPr lang="en-US" sz="1200" dirty="0"/>
           </a:p>
@@ -10498,7 +10498,7 @@
                 <a:ea typeface="PingFang SC" pitchFamily="34" charset="-122"/>
                 <a:cs typeface="PingFang SC" pitchFamily="34" charset="-120"/>
               </a:rPr>
-              <a:t>第一次的自然反应只用来看见"你这一型的习惯"；倒带后的那个选择，是你补全出来的一种。</a:t>
+              <a:t>第一次的自然反应只用来看见"你这一型的习惯"；倒带后的那个选择，是你解锁出来的一种。</a:t>
             </a:r>
             <a:endParaRPr lang="en-US" sz="1300" dirty="0"/>
           </a:p>
@@ -12719,7 +12719,7 @@
                 <a:ea typeface="PingFang SC" pitchFamily="34" charset="-122"/>
                 <a:cs typeface="PingFang SC" pitchFamily="34" charset="-120"/>
               </a:rPr>
-              <a:t>第三步 · 补全</a:t>
+              <a:t>第三步 · 解锁</a:t>
             </a:r>
             <a:endParaRPr lang="en-US" sz="1100" dirty="0"/>
           </a:p>
@@ -12847,7 +12847,7 @@
                 <a:ea typeface="PingFang SC" pitchFamily="34" charset="-122"/>
                 <a:cs typeface="PingFang SC" pitchFamily="34" charset="-120"/>
               </a:rPr>
-              <a:t>T 补全 F · 读懂人心</a:t>
+              <a:t>T 解锁 F · 读懂人心</a:t>
             </a:r>
             <a:endParaRPr lang="en-US" sz="1600" dirty="0"/>
           </a:p>
@@ -13042,7 +13042,7 @@
                 <a:ea typeface="PingFang SC" pitchFamily="34" charset="-122"/>
                 <a:cs typeface="PingFang SC" pitchFamily="34" charset="-120"/>
               </a:rPr>
-              <a:t>F 补全 T · 冷静解题</a:t>
+              <a:t>F 解锁 T · 冷静解题</a:t>
             </a:r>
             <a:endParaRPr lang="en-US" sz="1600" dirty="0"/>
           </a:p>

--- a/pitch/Overself-路演.pptx
+++ b/pitch/Overself-路演.pptx
@@ -2054,78 +2054,52 @@
             <a:avLst/>
           </a:prstGeom>
           <a:solidFill>
-            <a:srgbClr val="1B1A33">
+            <a:srgbClr val="281C5C">
               <a:alpha val="92000"/>
             </a:srgbClr>
           </a:solidFill>
           <a:ln w="12700">
             <a:solidFill>
-              <a:srgbClr val="1B1A33"/>
+              <a:srgbClr val="281C5C"/>
             </a:solidFill>
             <a:prstDash val="solid"/>
           </a:ln>
         </p:spPr>
       </p:sp>
-      <p:sp>
-        <p:nvSpPr>
-          <p:cNvPr id="3" name="Shape 1"/>
-          <p:cNvSpPr/>
-          <p:nvPr/>
-        </p:nvSpPr>
-        <p:spPr>
-          <a:xfrm>
-            <a:off x="640080" y="1234440"/>
-            <a:ext cx="548640" cy="91440"/>
-          </a:xfrm>
-          <a:prstGeom prst="rect">
-            <a:avLst/>
-          </a:prstGeom>
-          <a:solidFill>
-            <a:srgbClr val="4A8FE0"/>
-          </a:solidFill>
-          <a:ln w="12700">
-            <a:solidFill>
-              <a:srgbClr val="4A8FE0"/>
-            </a:solidFill>
-            <a:prstDash val="solid"/>
-          </a:ln>
-        </p:spPr>
-      </p:sp>
-      <p:sp>
-        <p:nvSpPr>
-          <p:cNvPr id="4" name="Shape 2"/>
-          <p:cNvSpPr/>
-          <p:nvPr/>
-        </p:nvSpPr>
-        <p:spPr>
-          <a:xfrm>
-            <a:off x="1188720" y="1234440"/>
-            <a:ext cx="548640" cy="91440"/>
-          </a:xfrm>
-          <a:prstGeom prst="rect">
-            <a:avLst/>
-          </a:prstGeom>
-          <a:solidFill>
-            <a:srgbClr val="F07C5A"/>
-          </a:solidFill>
-          <a:ln w="12700">
-            <a:solidFill>
-              <a:srgbClr val="F07C5A"/>
-            </a:solidFill>
-            <a:prstDash val="solid"/>
-          </a:ln>
-        </p:spPr>
-      </p:sp>
-      <p:sp>
-        <p:nvSpPr>
-          <p:cNvPr id="5" name="Text 3"/>
-          <p:cNvSpPr/>
-          <p:nvPr/>
-        </p:nvSpPr>
-        <p:spPr>
-          <a:xfrm>
-            <a:off x="640080" y="1417320"/>
-            <a:ext cx="6400800" cy="1005840"/>
+      <p:pic>
+        <p:nvPicPr>
+          <p:cNvPr id="3" name="Image 0" descr="/Users/bytedance/Desktop/complement-game/demo/img/logo-icon.png">    </p:cNvPr>
+          <p:cNvPicPr>
+            <a:picLocks noChangeAspect="1"/>
+          </p:cNvPicPr>
+          <p:nvPr/>
+        </p:nvPicPr>
+        <p:blipFill>
+          <a:blip r:embed="rId2"/>
+          <a:stretch>
+            <a:fillRect/>
+          </a:stretch>
+        </p:blipFill>
+        <p:spPr>
+          <a:xfrm>
+            <a:off x="640080" y="914400"/>
+            <a:ext cx="1005840" cy="1005840"/>
+          </a:xfrm>
+          <a:prstGeom prst="ellipse">
+            <a:avLst/>
+          </a:prstGeom>
+        </p:spPr>
+      </p:pic>
+      <p:sp>
+        <p:nvSpPr>
+          <p:cNvPr id="4" name="Text 1"/>
+          <p:cNvSpPr/>
+          <p:nvPr/>
+        </p:nvSpPr>
+        <p:spPr>
+          <a:xfrm>
+            <a:off x="1783080" y="1188720"/>
+            <a:ext cx="3657600" cy="457200"/>
           </a:xfrm>
           <a:prstGeom prst="rect">
             <a:avLst/>
@@ -2141,9 +2115,9 @@
               <a:buNone/>
             </a:pPr>
             <a:r>
-              <a:rPr lang="en-US" sz="6000" b="1" spc="200" kern="0" dirty="0">
-                <a:solidFill>
-                  <a:srgbClr val="FFFFFF"/>
+              <a:rPr lang="en-US" sz="1800" b="1" spc="400" kern="0" dirty="0">
+                <a:solidFill>
+                  <a:srgbClr val="D9CDFA"/>
                 </a:solidFill>
                 <a:latin typeface="PingFang SC" pitchFamily="34" charset="0"/>
                 <a:ea typeface="PingFang SC" pitchFamily="34" charset="-122"/>
@@ -2151,20 +2125,20 @@
               </a:rPr>
               <a:t>Overself</a:t>
             </a:r>
-            <a:endParaRPr lang="en-US" sz="6000" dirty="0"/>
-          </a:p>
-        </p:txBody>
-      </p:sp>
-      <p:sp>
-        <p:nvSpPr>
-          <p:cNvPr id="6" name="Text 4"/>
-          <p:cNvSpPr/>
-          <p:nvPr/>
-        </p:nvSpPr>
-        <p:spPr>
-          <a:xfrm>
-            <a:off x="640080" y="2514600"/>
-            <a:ext cx="6400800" cy="457200"/>
+            <a:endParaRPr lang="en-US" sz="1800" dirty="0"/>
+          </a:p>
+        </p:txBody>
+      </p:sp>
+      <p:sp>
+        <p:nvSpPr>
+          <p:cNvPr id="5" name="Text 2"/>
+          <p:cNvSpPr/>
+          <p:nvPr/>
+        </p:nvSpPr>
+        <p:spPr>
+          <a:xfrm>
+            <a:off x="640080" y="2103120"/>
+            <a:ext cx="7772400" cy="868680"/>
           </a:xfrm>
           <a:prstGeom prst="rect">
             <a:avLst/>
@@ -2180,30 +2154,44 @@
               <a:buNone/>
             </a:pPr>
             <a:r>
-              <a:rPr lang="en-US" sz="2600" b="1" dirty="0">
-                <a:solidFill>
-                  <a:srgbClr val="F2C14E"/>
-                </a:solidFill>
-                <a:latin typeface="PingFang SC" pitchFamily="34" charset="0"/>
-                <a:ea typeface="PingFang SC" pitchFamily="34" charset="-122"/>
-                <a:cs typeface="PingFang SC" pitchFamily="34" charset="-120"/>
-              </a:rPr>
-              <a:t>MBTI 性格解锁游戏</a:t>
-            </a:r>
-            <a:endParaRPr lang="en-US" sz="2600" dirty="0"/>
-          </a:p>
-        </p:txBody>
-      </p:sp>
-      <p:sp>
-        <p:nvSpPr>
-          <p:cNvPr id="7" name="Text 5"/>
-          <p:cNvSpPr/>
-          <p:nvPr/>
-        </p:nvSpPr>
-        <p:spPr>
-          <a:xfrm>
-            <a:off x="640080" y="3017520"/>
-            <a:ext cx="6400800" cy="365760"/>
+              <a:rPr lang="en-US" sz="4800" b="1" dirty="0">
+                <a:solidFill>
+                  <a:srgbClr val="FFFFFF"/>
+                </a:solidFill>
+                <a:latin typeface="PingFang SC" pitchFamily="34" charset="0"/>
+                <a:ea typeface="PingFang SC" pitchFamily="34" charset="-122"/>
+                <a:cs typeface="PingFang SC" pitchFamily="34" charset="-120"/>
+              </a:rPr>
+              <a:t>MBTI </a:t>
+            </a:r>
+            <a:pPr indent="0" marL="0">
+              <a:buNone/>
+            </a:pPr>
+            <a:r>
+              <a:rPr lang="en-US" sz="4800" b="1" dirty="0">
+                <a:solidFill>
+                  <a:srgbClr val="C9B2FF"/>
+                </a:solidFill>
+                <a:latin typeface="PingFang SC" pitchFamily="34" charset="0"/>
+                <a:ea typeface="PingFang SC" pitchFamily="34" charset="-122"/>
+                <a:cs typeface="PingFang SC" pitchFamily="34" charset="-120"/>
+              </a:rPr>
+              <a:t>性格修炼手册</a:t>
+            </a:r>
+            <a:endParaRPr lang="en-US" sz="4800" dirty="0"/>
+          </a:p>
+        </p:txBody>
+      </p:sp>
+      <p:sp>
+        <p:nvSpPr>
+          <p:cNvPr id="6" name="Text 3"/>
+          <p:cNvSpPr/>
+          <p:nvPr/>
+        </p:nvSpPr>
+        <p:spPr>
+          <a:xfrm>
+            <a:off x="640080" y="3063240"/>
+            <a:ext cx="6400800" cy="411480"/>
           </a:xfrm>
           <a:prstGeom prst="rect">
             <a:avLst/>
@@ -2219,9 +2207,9 @@
               <a:buNone/>
             </a:pPr>
             <a:r>
-              <a:rPr lang="en-US" sz="1500" dirty="0">
-                <a:solidFill>
-                  <a:srgbClr val="FFFFFF"/>
+              <a:rPr lang="en-US" sz="1800" b="1" dirty="0">
+                <a:solidFill>
+                  <a:srgbClr val="F2C14E"/>
                 </a:solidFill>
                 <a:latin typeface="PingFang SC" pitchFamily="34" charset="0"/>
                 <a:ea typeface="PingFang SC" pitchFamily="34" charset="-122"/>
@@ -2229,13 +2217,13 @@
               </a:rPr>
               <a:t>测出你的 MBTI，体验另一面，解锁另一个你。</a:t>
             </a:r>
-            <a:endParaRPr lang="en-US" sz="1500" dirty="0"/>
-          </a:p>
-        </p:txBody>
-      </p:sp>
-      <p:sp>
-        <p:nvSpPr>
-          <p:cNvPr id="8" name="Text 6"/>
+            <a:endParaRPr lang="en-US" sz="1800" dirty="0"/>
+          </a:p>
+        </p:txBody>
+      </p:sp>
+      <p:sp>
+        <p:nvSpPr>
+          <p:cNvPr id="7" name="Text 4"/>
           <p:cNvSpPr/>
           <p:nvPr/>
         </p:nvSpPr>
@@ -3660,7 +3648,7 @@
     <p:bg>
       <p:bgPr>
         <a:solidFill>
-          <a:srgbClr val="1B1A33"/>
+          <a:srgbClr val="281C5C"/>
         </a:solidFill>
       </p:bgPr>
     </p:bg>
@@ -3903,7 +3891,7 @@
                   <a:tcPr marL="91440" marR="91440" marT="45720" marB="45720" anchor="ctr">
                     <a:lnL w="9525" cap="flat" cmpd="sng" algn="ctr">
                       <a:solidFill>
-                        <a:srgbClr val="4A4770"/>
+                        <a:srgbClr val="5A4A9C"/>
                       </a:solidFill>
                       <a:prstDash val="solid"/>
                       <a:round/>
@@ -3912,7 +3900,7 @@
                     </a:lnL>
                     <a:lnR w="9525" cap="flat" cmpd="sng" algn="ctr">
                       <a:solidFill>
-                        <a:srgbClr val="4A4770"/>
+                        <a:srgbClr val="5A4A9C"/>
                       </a:solidFill>
                       <a:prstDash val="solid"/>
                       <a:round/>
@@ -3921,7 +3909,7 @@
                     </a:lnR>
                     <a:lnT w="9525" cap="flat" cmpd="sng" algn="ctr">
                       <a:solidFill>
-                        <a:srgbClr val="4A4770"/>
+                        <a:srgbClr val="5A4A9C"/>
                       </a:solidFill>
                       <a:prstDash val="solid"/>
                       <a:round/>
@@ -3930,7 +3918,7 @@
                     </a:lnT>
                     <a:lnB w="9525" cap="flat" cmpd="sng" algn="ctr">
                       <a:solidFill>
-                        <a:srgbClr val="4A4770"/>
+                        <a:srgbClr val="5A4A9C"/>
                       </a:solidFill>
                       <a:prstDash val="solid"/>
                       <a:round/>
@@ -3938,7 +3926,7 @@
                       <a:tailEnd type="none" w="med" len="med"/>
                     </a:lnB>
                     <a:solidFill>
-                      <a:srgbClr val="3A3760"/>
+                      <a:srgbClr val="4D3C8F"/>
                     </a:solidFill>
                   </a:tcPr>
                 </a:tc>
@@ -3971,7 +3959,7 @@
                   <a:tcPr marL="91440" marR="91440" marT="45720" marB="45720" anchor="ctr">
                     <a:lnL w="9525" cap="flat" cmpd="sng" algn="ctr">
                       <a:solidFill>
-                        <a:srgbClr val="4A4770"/>
+                        <a:srgbClr val="5A4A9C"/>
                       </a:solidFill>
                       <a:prstDash val="solid"/>
                       <a:round/>
@@ -3980,7 +3968,7 @@
                     </a:lnL>
                     <a:lnR w="9525" cap="flat" cmpd="sng" algn="ctr">
                       <a:solidFill>
-                        <a:srgbClr val="4A4770"/>
+                        <a:srgbClr val="5A4A9C"/>
                       </a:solidFill>
                       <a:prstDash val="solid"/>
                       <a:round/>
@@ -3989,7 +3977,7 @@
                     </a:lnR>
                     <a:lnT w="9525" cap="flat" cmpd="sng" algn="ctr">
                       <a:solidFill>
-                        <a:srgbClr val="4A4770"/>
+                        <a:srgbClr val="5A4A9C"/>
                       </a:solidFill>
                       <a:prstDash val="solid"/>
                       <a:round/>
@@ -3998,7 +3986,7 @@
                     </a:lnT>
                     <a:lnB w="9525" cap="flat" cmpd="sng" algn="ctr">
                       <a:solidFill>
-                        <a:srgbClr val="4A4770"/>
+                        <a:srgbClr val="5A4A9C"/>
                       </a:solidFill>
                       <a:prstDash val="solid"/>
                       <a:round/>
@@ -4006,7 +3994,7 @@
                       <a:tailEnd type="none" w="med" len="med"/>
                     </a:lnB>
                     <a:solidFill>
-                      <a:srgbClr val="3A3760"/>
+                      <a:srgbClr val="4D3C8F"/>
                     </a:solidFill>
                   </a:tcPr>
                 </a:tc>
@@ -4039,7 +4027,7 @@
                   <a:tcPr marL="91440" marR="91440" marT="45720" marB="45720" anchor="ctr">
                     <a:lnL w="9525" cap="flat" cmpd="sng" algn="ctr">
                       <a:solidFill>
-                        <a:srgbClr val="4A4770"/>
+                        <a:srgbClr val="5A4A9C"/>
                       </a:solidFill>
                       <a:prstDash val="solid"/>
                       <a:round/>
@@ -4048,7 +4036,7 @@
                     </a:lnL>
                     <a:lnR w="9525" cap="flat" cmpd="sng" algn="ctr">
                       <a:solidFill>
-                        <a:srgbClr val="4A4770"/>
+                        <a:srgbClr val="5A4A9C"/>
                       </a:solidFill>
                       <a:prstDash val="solid"/>
                       <a:round/>
@@ -4057,7 +4045,7 @@
                     </a:lnR>
                     <a:lnT w="9525" cap="flat" cmpd="sng" algn="ctr">
                       <a:solidFill>
-                        <a:srgbClr val="4A4770"/>
+                        <a:srgbClr val="5A4A9C"/>
                       </a:solidFill>
                       <a:prstDash val="solid"/>
                       <a:round/>
@@ -4066,7 +4054,7 @@
                     </a:lnT>
                     <a:lnB w="9525" cap="flat" cmpd="sng" algn="ctr">
                       <a:solidFill>
-                        <a:srgbClr val="4A4770"/>
+                        <a:srgbClr val="5A4A9C"/>
                       </a:solidFill>
                       <a:prstDash val="solid"/>
                       <a:round/>
@@ -4074,7 +4062,7 @@
                       <a:tailEnd type="none" w="med" len="med"/>
                     </a:lnB>
                     <a:solidFill>
-                      <a:srgbClr val="3A3760"/>
+                      <a:srgbClr val="4D3C8F"/>
                     </a:solidFill>
                   </a:tcPr>
                 </a:tc>
@@ -4107,7 +4095,7 @@
                   <a:tcPr marL="91440" marR="91440" marT="45720" marB="45720" anchor="ctr">
                     <a:lnL w="9525" cap="flat" cmpd="sng" algn="ctr">
                       <a:solidFill>
-                        <a:srgbClr val="4A4770"/>
+                        <a:srgbClr val="5A4A9C"/>
                       </a:solidFill>
                       <a:prstDash val="solid"/>
                       <a:round/>
@@ -4116,7 +4104,7 @@
                     </a:lnL>
                     <a:lnR w="9525" cap="flat" cmpd="sng" algn="ctr">
                       <a:solidFill>
-                        <a:srgbClr val="4A4770"/>
+                        <a:srgbClr val="5A4A9C"/>
                       </a:solidFill>
                       <a:prstDash val="solid"/>
                       <a:round/>
@@ -4125,7 +4113,7 @@
                     </a:lnR>
                     <a:lnT w="9525" cap="flat" cmpd="sng" algn="ctr">
                       <a:solidFill>
-                        <a:srgbClr val="4A4770"/>
+                        <a:srgbClr val="5A4A9C"/>
                       </a:solidFill>
                       <a:prstDash val="solid"/>
                       <a:round/>
@@ -4134,7 +4122,7 @@
                     </a:lnT>
                     <a:lnB w="9525" cap="flat" cmpd="sng" algn="ctr">
                       <a:solidFill>
-                        <a:srgbClr val="4A4770"/>
+                        <a:srgbClr val="5A4A9C"/>
                       </a:solidFill>
                       <a:prstDash val="solid"/>
                       <a:round/>
@@ -4142,7 +4130,7 @@
                       <a:tailEnd type="none" w="med" len="med"/>
                     </a:lnB>
                     <a:solidFill>
-                      <a:srgbClr val="3A3760"/>
+                      <a:srgbClr val="4D3C8F"/>
                     </a:solidFill>
                   </a:tcPr>
                 </a:tc>
@@ -4177,7 +4165,7 @@
                   <a:tcPr marL="91440" marR="91440" marT="45720" marB="45720" anchor="ctr">
                     <a:lnL w="9525" cap="flat" cmpd="sng" algn="ctr">
                       <a:solidFill>
-                        <a:srgbClr val="4A4770"/>
+                        <a:srgbClr val="5A4A9C"/>
                       </a:solidFill>
                       <a:prstDash val="solid"/>
                       <a:round/>
@@ -4186,7 +4174,7 @@
                     </a:lnL>
                     <a:lnR w="9525" cap="flat" cmpd="sng" algn="ctr">
                       <a:solidFill>
-                        <a:srgbClr val="4A4770"/>
+                        <a:srgbClr val="5A4A9C"/>
                       </a:solidFill>
                       <a:prstDash val="solid"/>
                       <a:round/>
@@ -4195,7 +4183,7 @@
                     </a:lnR>
                     <a:lnT w="9525" cap="flat" cmpd="sng" algn="ctr">
                       <a:solidFill>
-                        <a:srgbClr val="4A4770"/>
+                        <a:srgbClr val="5A4A9C"/>
                       </a:solidFill>
                       <a:prstDash val="solid"/>
                       <a:round/>
@@ -4204,7 +4192,7 @@
                     </a:lnT>
                     <a:lnB w="9525" cap="flat" cmpd="sng" algn="ctr">
                       <a:solidFill>
-                        <a:srgbClr val="4A4770"/>
+                        <a:srgbClr val="5A4A9C"/>
                       </a:solidFill>
                       <a:prstDash val="solid"/>
                       <a:round/>
@@ -4212,7 +4200,7 @@
                       <a:tailEnd type="none" w="med" len="med"/>
                     </a:lnB>
                     <a:solidFill>
-                      <a:srgbClr val="2C2A4A"/>
+                      <a:srgbClr val="3A2B78"/>
                     </a:solidFill>
                   </a:tcPr>
                 </a:tc>
@@ -4245,7 +4233,7 @@
                   <a:tcPr marL="91440" marR="91440" marT="45720" marB="45720" anchor="ctr">
                     <a:lnL w="9525" cap="flat" cmpd="sng" algn="ctr">
                       <a:solidFill>
-                        <a:srgbClr val="4A4770"/>
+                        <a:srgbClr val="5A4A9C"/>
                       </a:solidFill>
                       <a:prstDash val="solid"/>
                       <a:round/>
@@ -4254,7 +4242,7 @@
                     </a:lnL>
                     <a:lnR w="9525" cap="flat" cmpd="sng" algn="ctr">
                       <a:solidFill>
-                        <a:srgbClr val="4A4770"/>
+                        <a:srgbClr val="5A4A9C"/>
                       </a:solidFill>
                       <a:prstDash val="solid"/>
                       <a:round/>
@@ -4263,7 +4251,7 @@
                     </a:lnR>
                     <a:lnT w="9525" cap="flat" cmpd="sng" algn="ctr">
                       <a:solidFill>
-                        <a:srgbClr val="4A4770"/>
+                        <a:srgbClr val="5A4A9C"/>
                       </a:solidFill>
                       <a:prstDash val="solid"/>
                       <a:round/>
@@ -4272,7 +4260,7 @@
                     </a:lnT>
                     <a:lnB w="9525" cap="flat" cmpd="sng" algn="ctr">
                       <a:solidFill>
-                        <a:srgbClr val="4A4770"/>
+                        <a:srgbClr val="5A4A9C"/>
                       </a:solidFill>
                       <a:prstDash val="solid"/>
                       <a:round/>
@@ -4280,7 +4268,7 @@
                       <a:tailEnd type="none" w="med" len="med"/>
                     </a:lnB>
                     <a:solidFill>
-                      <a:srgbClr val="2C2A4A"/>
+                      <a:srgbClr val="3A2B78"/>
                     </a:solidFill>
                   </a:tcPr>
                 </a:tc>
@@ -4313,7 +4301,7 @@
                   <a:tcPr marL="91440" marR="91440" marT="45720" marB="45720" anchor="ctr">
                     <a:lnL w="9525" cap="flat" cmpd="sng" algn="ctr">
                       <a:solidFill>
-                        <a:srgbClr val="4A4770"/>
+                        <a:srgbClr val="5A4A9C"/>
                       </a:solidFill>
                       <a:prstDash val="solid"/>
                       <a:round/>
@@ -4322,7 +4310,7 @@
                     </a:lnL>
                     <a:lnR w="9525" cap="flat" cmpd="sng" algn="ctr">
                       <a:solidFill>
-                        <a:srgbClr val="4A4770"/>
+                        <a:srgbClr val="5A4A9C"/>
                       </a:solidFill>
                       <a:prstDash val="solid"/>
                       <a:round/>
@@ -4331,7 +4319,7 @@
                     </a:lnR>
                     <a:lnT w="9525" cap="flat" cmpd="sng" algn="ctr">
                       <a:solidFill>
-                        <a:srgbClr val="4A4770"/>
+                        <a:srgbClr val="5A4A9C"/>
                       </a:solidFill>
                       <a:prstDash val="solid"/>
                       <a:round/>
@@ -4340,7 +4328,7 @@
                     </a:lnT>
                     <a:lnB w="9525" cap="flat" cmpd="sng" algn="ctr">
                       <a:solidFill>
-                        <a:srgbClr val="4A4770"/>
+                        <a:srgbClr val="5A4A9C"/>
                       </a:solidFill>
                       <a:prstDash val="solid"/>
                       <a:round/>
@@ -4348,7 +4336,7 @@
                       <a:tailEnd type="none" w="med" len="med"/>
                     </a:lnB>
                     <a:solidFill>
-                      <a:srgbClr val="2C2A4A"/>
+                      <a:srgbClr val="3A2B78"/>
                     </a:solidFill>
                   </a:tcPr>
                 </a:tc>
@@ -4381,7 +4369,7 @@
                   <a:tcPr marL="91440" marR="91440" marT="45720" marB="45720" anchor="ctr">
                     <a:lnL w="9525" cap="flat" cmpd="sng" algn="ctr">
                       <a:solidFill>
-                        <a:srgbClr val="4A4770"/>
+                        <a:srgbClr val="5A4A9C"/>
                       </a:solidFill>
                       <a:prstDash val="solid"/>
                       <a:round/>
@@ -4390,7 +4378,7 @@
                     </a:lnL>
                     <a:lnR w="9525" cap="flat" cmpd="sng" algn="ctr">
                       <a:solidFill>
-                        <a:srgbClr val="4A4770"/>
+                        <a:srgbClr val="5A4A9C"/>
                       </a:solidFill>
                       <a:prstDash val="solid"/>
                       <a:round/>
@@ -4399,7 +4387,7 @@
                     </a:lnR>
                     <a:lnT w="9525" cap="flat" cmpd="sng" algn="ctr">
                       <a:solidFill>
-                        <a:srgbClr val="4A4770"/>
+                        <a:srgbClr val="5A4A9C"/>
                       </a:solidFill>
                       <a:prstDash val="solid"/>
                       <a:round/>
@@ -4408,7 +4396,7 @@
                     </a:lnT>
                     <a:lnB w="9525" cap="flat" cmpd="sng" algn="ctr">
                       <a:solidFill>
-                        <a:srgbClr val="4A4770"/>
+                        <a:srgbClr val="5A4A9C"/>
                       </a:solidFill>
                       <a:prstDash val="solid"/>
                       <a:round/>
@@ -4416,7 +4404,7 @@
                       <a:tailEnd type="none" w="med" len="med"/>
                     </a:lnB>
                     <a:solidFill>
-                      <a:srgbClr val="2C2A4A"/>
+                      <a:srgbClr val="3A2B78"/>
                     </a:solidFill>
                   </a:tcPr>
                 </a:tc>
@@ -4451,7 +4439,7 @@
                   <a:tcPr marL="91440" marR="91440" marT="45720" marB="45720" anchor="ctr">
                     <a:lnL w="9525" cap="flat" cmpd="sng" algn="ctr">
                       <a:solidFill>
-                        <a:srgbClr val="4A4770"/>
+                        <a:srgbClr val="5A4A9C"/>
                       </a:solidFill>
                       <a:prstDash val="solid"/>
                       <a:round/>
@@ -4460,7 +4448,7 @@
                     </a:lnL>
                     <a:lnR w="9525" cap="flat" cmpd="sng" algn="ctr">
                       <a:solidFill>
-                        <a:srgbClr val="4A4770"/>
+                        <a:srgbClr val="5A4A9C"/>
                       </a:solidFill>
                       <a:prstDash val="solid"/>
                       <a:round/>
@@ -4469,7 +4457,7 @@
                     </a:lnR>
                     <a:lnT w="9525" cap="flat" cmpd="sng" algn="ctr">
                       <a:solidFill>
-                        <a:srgbClr val="4A4770"/>
+                        <a:srgbClr val="5A4A9C"/>
                       </a:solidFill>
                       <a:prstDash val="solid"/>
                       <a:round/>
@@ -4478,7 +4466,7 @@
                     </a:lnT>
                     <a:lnB w="9525" cap="flat" cmpd="sng" algn="ctr">
                       <a:solidFill>
-                        <a:srgbClr val="4A4770"/>
+                        <a:srgbClr val="5A4A9C"/>
                       </a:solidFill>
                       <a:prstDash val="solid"/>
                       <a:round/>
@@ -4486,7 +4474,7 @@
                       <a:tailEnd type="none" w="med" len="med"/>
                     </a:lnB>
                     <a:solidFill>
-                      <a:srgbClr val="2C2A4A"/>
+                      <a:srgbClr val="3A2B78"/>
                     </a:solidFill>
                   </a:tcPr>
                 </a:tc>
@@ -4519,7 +4507,7 @@
                   <a:tcPr marL="91440" marR="91440" marT="45720" marB="45720" anchor="ctr">
                     <a:lnL w="9525" cap="flat" cmpd="sng" algn="ctr">
                       <a:solidFill>
-                        <a:srgbClr val="4A4770"/>
+                        <a:srgbClr val="5A4A9C"/>
                       </a:solidFill>
                       <a:prstDash val="solid"/>
                       <a:round/>
@@ -4528,7 +4516,7 @@
                     </a:lnL>
                     <a:lnR w="9525" cap="flat" cmpd="sng" algn="ctr">
                       <a:solidFill>
-                        <a:srgbClr val="4A4770"/>
+                        <a:srgbClr val="5A4A9C"/>
                       </a:solidFill>
                       <a:prstDash val="solid"/>
                       <a:round/>
@@ -4537,7 +4525,7 @@
                     </a:lnR>
                     <a:lnT w="9525" cap="flat" cmpd="sng" algn="ctr">
                       <a:solidFill>
-                        <a:srgbClr val="4A4770"/>
+                        <a:srgbClr val="5A4A9C"/>
                       </a:solidFill>
                       <a:prstDash val="solid"/>
                       <a:round/>
@@ -4546,7 +4534,7 @@
                     </a:lnT>
                     <a:lnB w="9525" cap="flat" cmpd="sng" algn="ctr">
                       <a:solidFill>
-                        <a:srgbClr val="4A4770"/>
+                        <a:srgbClr val="5A4A9C"/>
                       </a:solidFill>
                       <a:prstDash val="solid"/>
                       <a:round/>
@@ -4554,7 +4542,7 @@
                       <a:tailEnd type="none" w="med" len="med"/>
                     </a:lnB>
                     <a:solidFill>
-                      <a:srgbClr val="2C2A4A"/>
+                      <a:srgbClr val="3A2B78"/>
                     </a:solidFill>
                   </a:tcPr>
                 </a:tc>
@@ -4587,7 +4575,7 @@
                   <a:tcPr marL="91440" marR="91440" marT="45720" marB="45720" anchor="ctr">
                     <a:lnL w="9525" cap="flat" cmpd="sng" algn="ctr">
                       <a:solidFill>
-                        <a:srgbClr val="4A4770"/>
+                        <a:srgbClr val="5A4A9C"/>
                       </a:solidFill>
                       <a:prstDash val="solid"/>
                       <a:round/>
@@ -4596,7 +4584,7 @@
                     </a:lnL>
                     <a:lnR w="9525" cap="flat" cmpd="sng" algn="ctr">
                       <a:solidFill>
-                        <a:srgbClr val="4A4770"/>
+                        <a:srgbClr val="5A4A9C"/>
                       </a:solidFill>
                       <a:prstDash val="solid"/>
                       <a:round/>
@@ -4605,7 +4593,7 @@
                     </a:lnR>
                     <a:lnT w="9525" cap="flat" cmpd="sng" algn="ctr">
                       <a:solidFill>
-                        <a:srgbClr val="4A4770"/>
+                        <a:srgbClr val="5A4A9C"/>
                       </a:solidFill>
                       <a:prstDash val="solid"/>
                       <a:round/>
@@ -4614,7 +4602,7 @@
                     </a:lnT>
                     <a:lnB w="9525" cap="flat" cmpd="sng" algn="ctr">
                       <a:solidFill>
-                        <a:srgbClr val="4A4770"/>
+                        <a:srgbClr val="5A4A9C"/>
                       </a:solidFill>
                       <a:prstDash val="solid"/>
                       <a:round/>
@@ -4622,7 +4610,7 @@
                       <a:tailEnd type="none" w="med" len="med"/>
                     </a:lnB>
                     <a:solidFill>
-                      <a:srgbClr val="2C2A4A"/>
+                      <a:srgbClr val="3A2B78"/>
                     </a:solidFill>
                   </a:tcPr>
                 </a:tc>
@@ -4655,7 +4643,7 @@
                   <a:tcPr marL="91440" marR="91440" marT="45720" marB="45720" anchor="ctr">
                     <a:lnL w="9525" cap="flat" cmpd="sng" algn="ctr">
                       <a:solidFill>
-                        <a:srgbClr val="4A4770"/>
+                        <a:srgbClr val="5A4A9C"/>
                       </a:solidFill>
                       <a:prstDash val="solid"/>
                       <a:round/>
@@ -4664,7 +4652,7 @@
                     </a:lnL>
                     <a:lnR w="9525" cap="flat" cmpd="sng" algn="ctr">
                       <a:solidFill>
-                        <a:srgbClr val="4A4770"/>
+                        <a:srgbClr val="5A4A9C"/>
                       </a:solidFill>
                       <a:prstDash val="solid"/>
                       <a:round/>
@@ -4673,7 +4661,7 @@
                     </a:lnR>
                     <a:lnT w="9525" cap="flat" cmpd="sng" algn="ctr">
                       <a:solidFill>
-                        <a:srgbClr val="4A4770"/>
+                        <a:srgbClr val="5A4A9C"/>
                       </a:solidFill>
                       <a:prstDash val="solid"/>
                       <a:round/>
@@ -4682,7 +4670,7 @@
                     </a:lnT>
                     <a:lnB w="9525" cap="flat" cmpd="sng" algn="ctr">
                       <a:solidFill>
-                        <a:srgbClr val="4A4770"/>
+                        <a:srgbClr val="5A4A9C"/>
                       </a:solidFill>
                       <a:prstDash val="solid"/>
                       <a:round/>
@@ -4690,7 +4678,7 @@
                       <a:tailEnd type="none" w="med" len="med"/>
                     </a:lnB>
                     <a:solidFill>
-                      <a:srgbClr val="2C2A4A"/>
+                      <a:srgbClr val="3A2B78"/>
                     </a:solidFill>
                   </a:tcPr>
                 </a:tc>
@@ -4725,7 +4713,7 @@
                   <a:tcPr marL="91440" marR="91440" marT="45720" marB="45720" anchor="ctr">
                     <a:lnL w="9525" cap="flat" cmpd="sng" algn="ctr">
                       <a:solidFill>
-                        <a:srgbClr val="4A4770"/>
+                        <a:srgbClr val="5A4A9C"/>
                       </a:solidFill>
                       <a:prstDash val="solid"/>
                       <a:round/>
@@ -4734,7 +4722,7 @@
                     </a:lnL>
                     <a:lnR w="9525" cap="flat" cmpd="sng" algn="ctr">
                       <a:solidFill>
-                        <a:srgbClr val="4A4770"/>
+                        <a:srgbClr val="5A4A9C"/>
                       </a:solidFill>
                       <a:prstDash val="solid"/>
                       <a:round/>
@@ -4743,7 +4731,7 @@
                     </a:lnR>
                     <a:lnT w="9525" cap="flat" cmpd="sng" algn="ctr">
                       <a:solidFill>
-                        <a:srgbClr val="4A4770"/>
+                        <a:srgbClr val="5A4A9C"/>
                       </a:solidFill>
                       <a:prstDash val="solid"/>
                       <a:round/>
@@ -4752,7 +4740,7 @@
                     </a:lnT>
                     <a:lnB w="9525" cap="flat" cmpd="sng" algn="ctr">
                       <a:solidFill>
-                        <a:srgbClr val="4A4770"/>
+                        <a:srgbClr val="5A4A9C"/>
                       </a:solidFill>
                       <a:prstDash val="solid"/>
                       <a:round/>
@@ -4760,7 +4748,7 @@
                       <a:tailEnd type="none" w="med" len="med"/>
                     </a:lnB>
                     <a:solidFill>
-                      <a:srgbClr val="2C2A4A"/>
+                      <a:srgbClr val="3A2B78"/>
                     </a:solidFill>
                   </a:tcPr>
                 </a:tc>
@@ -4793,7 +4781,7 @@
                   <a:tcPr marL="91440" marR="91440" marT="45720" marB="45720" anchor="ctr">
                     <a:lnL w="9525" cap="flat" cmpd="sng" algn="ctr">
                       <a:solidFill>
-                        <a:srgbClr val="4A4770"/>
+                        <a:srgbClr val="5A4A9C"/>
                       </a:solidFill>
                       <a:prstDash val="solid"/>
                       <a:round/>
@@ -4802,7 +4790,7 @@
                     </a:lnL>
                     <a:lnR w="9525" cap="flat" cmpd="sng" algn="ctr">
                       <a:solidFill>
-                        <a:srgbClr val="4A4770"/>
+                        <a:srgbClr val="5A4A9C"/>
                       </a:solidFill>
                       <a:prstDash val="solid"/>
                       <a:round/>
@@ -4811,7 +4799,7 @@
                     </a:lnR>
                     <a:lnT w="9525" cap="flat" cmpd="sng" algn="ctr">
                       <a:solidFill>
-                        <a:srgbClr val="4A4770"/>
+                        <a:srgbClr val="5A4A9C"/>
                       </a:solidFill>
                       <a:prstDash val="solid"/>
                       <a:round/>
@@ -4820,7 +4808,7 @@
                     </a:lnT>
                     <a:lnB w="9525" cap="flat" cmpd="sng" algn="ctr">
                       <a:solidFill>
-                        <a:srgbClr val="4A4770"/>
+                        <a:srgbClr val="5A4A9C"/>
                       </a:solidFill>
                       <a:prstDash val="solid"/>
                       <a:round/>
@@ -4828,7 +4816,7 @@
                       <a:tailEnd type="none" w="med" len="med"/>
                     </a:lnB>
                     <a:solidFill>
-                      <a:srgbClr val="2C2A4A"/>
+                      <a:srgbClr val="3A2B78"/>
                     </a:solidFill>
                   </a:tcPr>
                 </a:tc>
@@ -4861,7 +4849,7 @@
                   <a:tcPr marL="91440" marR="91440" marT="45720" marB="45720" anchor="ctr">
                     <a:lnL w="9525" cap="flat" cmpd="sng" algn="ctr">
                       <a:solidFill>
-                        <a:srgbClr val="4A4770"/>
+                        <a:srgbClr val="5A4A9C"/>
                       </a:solidFill>
                       <a:prstDash val="solid"/>
                       <a:round/>
@@ -4870,7 +4858,7 @@
                     </a:lnL>
                     <a:lnR w="9525" cap="flat" cmpd="sng" algn="ctr">
                       <a:solidFill>
-                        <a:srgbClr val="4A4770"/>
+                        <a:srgbClr val="5A4A9C"/>
                       </a:solidFill>
                       <a:prstDash val="solid"/>
                       <a:round/>
@@ -4879,7 +4867,7 @@
                     </a:lnR>
                     <a:lnT w="9525" cap="flat" cmpd="sng" algn="ctr">
                       <a:solidFill>
-                        <a:srgbClr val="4A4770"/>
+                        <a:srgbClr val="5A4A9C"/>
                       </a:solidFill>
                       <a:prstDash val="solid"/>
                       <a:round/>
@@ -4888,7 +4876,7 @@
                     </a:lnT>
                     <a:lnB w="9525" cap="flat" cmpd="sng" algn="ctr">
                       <a:solidFill>
-                        <a:srgbClr val="4A4770"/>
+                        <a:srgbClr val="5A4A9C"/>
                       </a:solidFill>
                       <a:prstDash val="solid"/>
                       <a:round/>
@@ -4896,7 +4884,7 @@
                       <a:tailEnd type="none" w="med" len="med"/>
                     </a:lnB>
                     <a:solidFill>
-                      <a:srgbClr val="2C2A4A"/>
+                      <a:srgbClr val="3A2B78"/>
                     </a:solidFill>
                   </a:tcPr>
                 </a:tc>
@@ -4929,7 +4917,7 @@
                   <a:tcPr marL="91440" marR="91440" marT="45720" marB="45720" anchor="ctr">
                     <a:lnL w="9525" cap="flat" cmpd="sng" algn="ctr">
                       <a:solidFill>
-                        <a:srgbClr val="4A4770"/>
+                        <a:srgbClr val="5A4A9C"/>
                       </a:solidFill>
                       <a:prstDash val="solid"/>
                       <a:round/>
@@ -4938,7 +4926,7 @@
                     </a:lnL>
                     <a:lnR w="9525" cap="flat" cmpd="sng" algn="ctr">
                       <a:solidFill>
-                        <a:srgbClr val="4A4770"/>
+                        <a:srgbClr val="5A4A9C"/>
                       </a:solidFill>
                       <a:prstDash val="solid"/>
                       <a:round/>
@@ -4947,7 +4935,7 @@
                     </a:lnR>
                     <a:lnT w="9525" cap="flat" cmpd="sng" algn="ctr">
                       <a:solidFill>
-                        <a:srgbClr val="4A4770"/>
+                        <a:srgbClr val="5A4A9C"/>
                       </a:solidFill>
                       <a:prstDash val="solid"/>
                       <a:round/>
@@ -4956,7 +4944,7 @@
                     </a:lnT>
                     <a:lnB w="9525" cap="flat" cmpd="sng" algn="ctr">
                       <a:solidFill>
-                        <a:srgbClr val="4A4770"/>
+                        <a:srgbClr val="5A4A9C"/>
                       </a:solidFill>
                       <a:prstDash val="solid"/>
                       <a:round/>
@@ -4964,7 +4952,7 @@
                       <a:tailEnd type="none" w="med" len="med"/>
                     </a:lnB>
                     <a:solidFill>
-                      <a:srgbClr val="2C2A4A"/>
+                      <a:srgbClr val="3A2B78"/>
                     </a:solidFill>
                   </a:tcPr>
                 </a:tc>
@@ -4999,7 +4987,7 @@
                   <a:tcPr marL="91440" marR="91440" marT="45720" marB="45720" anchor="ctr">
                     <a:lnL w="9525" cap="flat" cmpd="sng" algn="ctr">
                       <a:solidFill>
-                        <a:srgbClr val="4A4770"/>
+                        <a:srgbClr val="5A4A9C"/>
                       </a:solidFill>
                       <a:prstDash val="solid"/>
                       <a:round/>
@@ -5008,7 +4996,7 @@
                     </a:lnL>
                     <a:lnR w="9525" cap="flat" cmpd="sng" algn="ctr">
                       <a:solidFill>
-                        <a:srgbClr val="4A4770"/>
+                        <a:srgbClr val="5A4A9C"/>
                       </a:solidFill>
                       <a:prstDash val="solid"/>
                       <a:round/>
@@ -5017,7 +5005,7 @@
                     </a:lnR>
                     <a:lnT w="9525" cap="flat" cmpd="sng" algn="ctr">
                       <a:solidFill>
-                        <a:srgbClr val="4A4770"/>
+                        <a:srgbClr val="5A4A9C"/>
                       </a:solidFill>
                       <a:prstDash val="solid"/>
                       <a:round/>
@@ -5026,7 +5014,7 @@
                     </a:lnT>
                     <a:lnB w="9525" cap="flat" cmpd="sng" algn="ctr">
                       <a:solidFill>
-                        <a:srgbClr val="4A4770"/>
+                        <a:srgbClr val="5A4A9C"/>
                       </a:solidFill>
                       <a:prstDash val="solid"/>
                       <a:round/>
@@ -5034,7 +5022,7 @@
                       <a:tailEnd type="none" w="med" len="med"/>
                     </a:lnB>
                     <a:solidFill>
-                      <a:srgbClr val="2C2A4A"/>
+                      <a:srgbClr val="3A2B78"/>
                     </a:solidFill>
                   </a:tcPr>
                 </a:tc>
@@ -5067,7 +5055,7 @@
                   <a:tcPr marL="91440" marR="91440" marT="45720" marB="45720" anchor="ctr">
                     <a:lnL w="9525" cap="flat" cmpd="sng" algn="ctr">
                       <a:solidFill>
-                        <a:srgbClr val="4A4770"/>
+                        <a:srgbClr val="5A4A9C"/>
                       </a:solidFill>
                       <a:prstDash val="solid"/>
                       <a:round/>
@@ -5076,7 +5064,7 @@
                     </a:lnL>
                     <a:lnR w="9525" cap="flat" cmpd="sng" algn="ctr">
                       <a:solidFill>
-                        <a:srgbClr val="4A4770"/>
+                        <a:srgbClr val="5A4A9C"/>
                       </a:solidFill>
                       <a:prstDash val="solid"/>
                       <a:round/>
@@ -5085,7 +5073,7 @@
                     </a:lnR>
                     <a:lnT w="9525" cap="flat" cmpd="sng" algn="ctr">
                       <a:solidFill>
-                        <a:srgbClr val="4A4770"/>
+                        <a:srgbClr val="5A4A9C"/>
                       </a:solidFill>
                       <a:prstDash val="solid"/>
                       <a:round/>
@@ -5094,7 +5082,7 @@
                     </a:lnT>
                     <a:lnB w="9525" cap="flat" cmpd="sng" algn="ctr">
                       <a:solidFill>
-                        <a:srgbClr val="4A4770"/>
+                        <a:srgbClr val="5A4A9C"/>
                       </a:solidFill>
                       <a:prstDash val="solid"/>
                       <a:round/>
@@ -5102,7 +5090,7 @@
                       <a:tailEnd type="none" w="med" len="med"/>
                     </a:lnB>
                     <a:solidFill>
-                      <a:srgbClr val="2C2A4A"/>
+                      <a:srgbClr val="3A2B78"/>
                     </a:solidFill>
                   </a:tcPr>
                 </a:tc>
@@ -5135,7 +5123,7 @@
                   <a:tcPr marL="91440" marR="91440" marT="45720" marB="45720" anchor="ctr">
                     <a:lnL w="9525" cap="flat" cmpd="sng" algn="ctr">
                       <a:solidFill>
-                        <a:srgbClr val="4A4770"/>
+                        <a:srgbClr val="5A4A9C"/>
                       </a:solidFill>
                       <a:prstDash val="solid"/>
                       <a:round/>
@@ -5144,7 +5132,7 @@
                     </a:lnL>
                     <a:lnR w="9525" cap="flat" cmpd="sng" algn="ctr">
                       <a:solidFill>
-                        <a:srgbClr val="4A4770"/>
+                        <a:srgbClr val="5A4A9C"/>
                       </a:solidFill>
                       <a:prstDash val="solid"/>
                       <a:round/>
@@ -5153,7 +5141,7 @@
                     </a:lnR>
                     <a:lnT w="9525" cap="flat" cmpd="sng" algn="ctr">
                       <a:solidFill>
-                        <a:srgbClr val="4A4770"/>
+                        <a:srgbClr val="5A4A9C"/>
                       </a:solidFill>
                       <a:prstDash val="solid"/>
                       <a:round/>
@@ -5162,7 +5150,7 @@
                     </a:lnT>
                     <a:lnB w="9525" cap="flat" cmpd="sng" algn="ctr">
                       <a:solidFill>
-                        <a:srgbClr val="4A4770"/>
+                        <a:srgbClr val="5A4A9C"/>
                       </a:solidFill>
                       <a:prstDash val="solid"/>
                       <a:round/>
@@ -5170,7 +5158,7 @@
                       <a:tailEnd type="none" w="med" len="med"/>
                     </a:lnB>
                     <a:solidFill>
-                      <a:srgbClr val="2C2A4A"/>
+                      <a:srgbClr val="3A2B78"/>
                     </a:solidFill>
                   </a:tcPr>
                 </a:tc>
@@ -5203,7 +5191,7 @@
                   <a:tcPr marL="91440" marR="91440" marT="45720" marB="45720" anchor="ctr">
                     <a:lnL w="9525" cap="flat" cmpd="sng" algn="ctr">
                       <a:solidFill>
-                        <a:srgbClr val="4A4770"/>
+                        <a:srgbClr val="5A4A9C"/>
                       </a:solidFill>
                       <a:prstDash val="solid"/>
                       <a:round/>
@@ -5212,7 +5200,7 @@
                     </a:lnL>
                     <a:lnR w="9525" cap="flat" cmpd="sng" algn="ctr">
                       <a:solidFill>
-                        <a:srgbClr val="4A4770"/>
+                        <a:srgbClr val="5A4A9C"/>
                       </a:solidFill>
                       <a:prstDash val="solid"/>
                       <a:round/>
@@ -5221,7 +5209,7 @@
                     </a:lnR>
                     <a:lnT w="9525" cap="flat" cmpd="sng" algn="ctr">
                       <a:solidFill>
-                        <a:srgbClr val="4A4770"/>
+                        <a:srgbClr val="5A4A9C"/>
                       </a:solidFill>
                       <a:prstDash val="solid"/>
                       <a:round/>
@@ -5230,7 +5218,7 @@
                     </a:lnT>
                     <a:lnB w="9525" cap="flat" cmpd="sng" algn="ctr">
                       <a:solidFill>
-                        <a:srgbClr val="4A4770"/>
+                        <a:srgbClr val="5A4A9C"/>
                       </a:solidFill>
                       <a:prstDash val="solid"/>
                       <a:round/>
@@ -5238,7 +5226,7 @@
                       <a:tailEnd type="none" w="med" len="med"/>
                     </a:lnB>
                     <a:solidFill>
-                      <a:srgbClr val="2C2A4A"/>
+                      <a:srgbClr val="3A2B78"/>
                     </a:solidFill>
                   </a:tcPr>
                 </a:tc>
@@ -6183,7 +6171,7 @@
     <p:bg>
       <p:bgPr>
         <a:solidFill>
-          <a:srgbClr val="1B1A33"/>
+          <a:srgbClr val="281C5C"/>
         </a:solidFill>
       </p:bgPr>
     </p:bg>
@@ -6418,7 +6406,7 @@
                 <a:ea typeface="PingFang SC" pitchFamily="34" charset="-122"/>
                 <a:cs typeface="PingFang SC" pitchFamily="34" charset="-120"/>
               </a:rPr>
-              <a:t>Overself · MBTI 性格解锁游戏</a:t>
+              <a:t>MBTI 性格修炼手册 · Overself</a:t>
             </a:r>
             <a:endParaRPr lang="en-US" sz="1400" dirty="0"/>
           </a:p>
@@ -6477,7 +6465,7 @@
     <p:bg>
       <p:bgPr>
         <a:solidFill>
-          <a:srgbClr val="1B1A33"/>
+          <a:srgbClr val="281C5C"/>
         </a:solidFill>
       </p:bgPr>
     </p:bg>
@@ -6799,7 +6787,7 @@
                   <a:tcPr marL="91440" marR="91440" marT="45720" marB="45720" anchor="ctr">
                     <a:lnL w="9525" cap="flat" cmpd="sng" algn="ctr">
                       <a:solidFill>
-                        <a:srgbClr val="4A4770"/>
+                        <a:srgbClr val="5A4A9C"/>
                       </a:solidFill>
                       <a:prstDash val="solid"/>
                       <a:round/>
@@ -6808,7 +6796,7 @@
                     </a:lnL>
                     <a:lnR w="9525" cap="flat" cmpd="sng" algn="ctr">
                       <a:solidFill>
-                        <a:srgbClr val="4A4770"/>
+                        <a:srgbClr val="5A4A9C"/>
                       </a:solidFill>
                       <a:prstDash val="solid"/>
                       <a:round/>
@@ -6817,7 +6805,7 @@
                     </a:lnR>
                     <a:lnT w="9525" cap="flat" cmpd="sng" algn="ctr">
                       <a:solidFill>
-                        <a:srgbClr val="4A4770"/>
+                        <a:srgbClr val="5A4A9C"/>
                       </a:solidFill>
                       <a:prstDash val="solid"/>
                       <a:round/>
@@ -6826,7 +6814,7 @@
                     </a:lnT>
                     <a:lnB w="9525" cap="flat" cmpd="sng" algn="ctr">
                       <a:solidFill>
-                        <a:srgbClr val="4A4770"/>
+                        <a:srgbClr val="5A4A9C"/>
                       </a:solidFill>
                       <a:prstDash val="solid"/>
                       <a:round/>
@@ -6834,7 +6822,7 @@
                       <a:tailEnd type="none" w="med" len="med"/>
                     </a:lnB>
                     <a:solidFill>
-                      <a:srgbClr val="3A3760"/>
+                      <a:srgbClr val="4D3C8F"/>
                     </a:solidFill>
                   </a:tcPr>
                 </a:tc>
@@ -6867,7 +6855,7 @@
                   <a:tcPr marL="91440" marR="91440" marT="45720" marB="45720" anchor="ctr">
                     <a:lnL w="9525" cap="flat" cmpd="sng" algn="ctr">
                       <a:solidFill>
-                        <a:srgbClr val="4A4770"/>
+                        <a:srgbClr val="5A4A9C"/>
                       </a:solidFill>
                       <a:prstDash val="solid"/>
                       <a:round/>
@@ -6876,7 +6864,7 @@
                     </a:lnL>
                     <a:lnR w="9525" cap="flat" cmpd="sng" algn="ctr">
                       <a:solidFill>
-                        <a:srgbClr val="4A4770"/>
+                        <a:srgbClr val="5A4A9C"/>
                       </a:solidFill>
                       <a:prstDash val="solid"/>
                       <a:round/>
@@ -6885,7 +6873,7 @@
                     </a:lnR>
                     <a:lnT w="9525" cap="flat" cmpd="sng" algn="ctr">
                       <a:solidFill>
-                        <a:srgbClr val="4A4770"/>
+                        <a:srgbClr val="5A4A9C"/>
                       </a:solidFill>
                       <a:prstDash val="solid"/>
                       <a:round/>
@@ -6894,7 +6882,7 @@
                     </a:lnT>
                     <a:lnB w="9525" cap="flat" cmpd="sng" algn="ctr">
                       <a:solidFill>
-                        <a:srgbClr val="4A4770"/>
+                        <a:srgbClr val="5A4A9C"/>
                       </a:solidFill>
                       <a:prstDash val="solid"/>
                       <a:round/>
@@ -6902,7 +6890,7 @@
                       <a:tailEnd type="none" w="med" len="med"/>
                     </a:lnB>
                     <a:solidFill>
-                      <a:srgbClr val="3A3760"/>
+                      <a:srgbClr val="4D3C8F"/>
                     </a:solidFill>
                   </a:tcPr>
                 </a:tc>
@@ -6917,13 +6905,13 @@
                       <a:r>
                         <a:rPr lang="en-US" sz="1150" b="1" dirty="0">
                           <a:solidFill>
-                            <a:srgbClr val="1B1A33"/>
+                            <a:srgbClr val="281C5C"/>
                           </a:solidFill>
                           <a:latin typeface="PingFang SC" pitchFamily="34" charset="0"/>
                           <a:ea typeface="PingFang SC" pitchFamily="34" charset="-122"/>
                           <a:cs typeface="PingFang SC" pitchFamily="34" charset="-120"/>
                         </a:rPr>
-                        <a:t>Overself</a:t>
+                        <a:t>MBTI 性格修炼手册</a:t>
                       </a:r>
                       <a:endParaRPr lang="en-US" sz="1150" dirty="0">
                         <a:latin typeface="PingFang SC" charset="0"/>
@@ -6935,7 +6923,7 @@
                   <a:tcPr marL="91440" marR="91440" marT="45720" marB="45720" anchor="ctr">
                     <a:lnL w="9525" cap="flat" cmpd="sng" algn="ctr">
                       <a:solidFill>
-                        <a:srgbClr val="4A4770"/>
+                        <a:srgbClr val="5A4A9C"/>
                       </a:solidFill>
                       <a:prstDash val="solid"/>
                       <a:round/>
@@ -6944,7 +6932,7 @@
                     </a:lnL>
                     <a:lnR w="9525" cap="flat" cmpd="sng" algn="ctr">
                       <a:solidFill>
-                        <a:srgbClr val="4A4770"/>
+                        <a:srgbClr val="5A4A9C"/>
                       </a:solidFill>
                       <a:prstDash val="solid"/>
                       <a:round/>
@@ -6953,7 +6941,7 @@
                     </a:lnR>
                     <a:lnT w="9525" cap="flat" cmpd="sng" algn="ctr">
                       <a:solidFill>
-                        <a:srgbClr val="4A4770"/>
+                        <a:srgbClr val="5A4A9C"/>
                       </a:solidFill>
                       <a:prstDash val="solid"/>
                       <a:round/>
@@ -6962,7 +6950,7 @@
                     </a:lnT>
                     <a:lnB w="9525" cap="flat" cmpd="sng" algn="ctr">
                       <a:solidFill>
-                        <a:srgbClr val="4A4770"/>
+                        <a:srgbClr val="5A4A9C"/>
                       </a:solidFill>
                       <a:prstDash val="solid"/>
                       <a:round/>
@@ -7005,7 +6993,7 @@
                   <a:tcPr marL="91440" marR="91440" marT="45720" marB="45720" anchor="ctr">
                     <a:lnL w="9525" cap="flat" cmpd="sng" algn="ctr">
                       <a:solidFill>
-                        <a:srgbClr val="4A4770"/>
+                        <a:srgbClr val="5A4A9C"/>
                       </a:solidFill>
                       <a:prstDash val="solid"/>
                       <a:round/>
@@ -7014,7 +7002,7 @@
                     </a:lnL>
                     <a:lnR w="9525" cap="flat" cmpd="sng" algn="ctr">
                       <a:solidFill>
-                        <a:srgbClr val="4A4770"/>
+                        <a:srgbClr val="5A4A9C"/>
                       </a:solidFill>
                       <a:prstDash val="solid"/>
                       <a:round/>
@@ -7023,7 +7011,7 @@
                     </a:lnR>
                     <a:lnT w="9525" cap="flat" cmpd="sng" algn="ctr">
                       <a:solidFill>
-                        <a:srgbClr val="4A4770"/>
+                        <a:srgbClr val="5A4A9C"/>
                       </a:solidFill>
                       <a:prstDash val="solid"/>
                       <a:round/>
@@ -7032,7 +7020,7 @@
                     </a:lnT>
                     <a:lnB w="9525" cap="flat" cmpd="sng" algn="ctr">
                       <a:solidFill>
-                        <a:srgbClr val="4A4770"/>
+                        <a:srgbClr val="5A4A9C"/>
                       </a:solidFill>
                       <a:prstDash val="solid"/>
                       <a:round/>
@@ -7040,7 +7028,7 @@
                       <a:tailEnd type="none" w="med" len="med"/>
                     </a:lnB>
                     <a:solidFill>
-                      <a:srgbClr val="2C2A4A"/>
+                      <a:srgbClr val="3A2B78"/>
                     </a:solidFill>
                   </a:tcPr>
                 </a:tc>
@@ -7073,7 +7061,7 @@
                   <a:tcPr marL="91440" marR="91440" marT="45720" marB="45720" anchor="ctr">
                     <a:lnL w="9525" cap="flat" cmpd="sng" algn="ctr">
                       <a:solidFill>
-                        <a:srgbClr val="4A4770"/>
+                        <a:srgbClr val="5A4A9C"/>
                       </a:solidFill>
                       <a:prstDash val="solid"/>
                       <a:round/>
@@ -7082,7 +7070,7 @@
                     </a:lnL>
                     <a:lnR w="9525" cap="flat" cmpd="sng" algn="ctr">
                       <a:solidFill>
-                        <a:srgbClr val="4A4770"/>
+                        <a:srgbClr val="5A4A9C"/>
                       </a:solidFill>
                       <a:prstDash val="solid"/>
                       <a:round/>
@@ -7091,7 +7079,7 @@
                     </a:lnR>
                     <a:lnT w="9525" cap="flat" cmpd="sng" algn="ctr">
                       <a:solidFill>
-                        <a:srgbClr val="4A4770"/>
+                        <a:srgbClr val="5A4A9C"/>
                       </a:solidFill>
                       <a:prstDash val="solid"/>
                       <a:round/>
@@ -7100,7 +7088,7 @@
                     </a:lnT>
                     <a:lnB w="9525" cap="flat" cmpd="sng" algn="ctr">
                       <a:solidFill>
-                        <a:srgbClr val="4A4770"/>
+                        <a:srgbClr val="5A4A9C"/>
                       </a:solidFill>
                       <a:prstDash val="solid"/>
                       <a:round/>
@@ -7108,7 +7096,7 @@
                       <a:tailEnd type="none" w="med" len="med"/>
                     </a:lnB>
                     <a:solidFill>
-                      <a:srgbClr val="2C2A4A"/>
+                      <a:srgbClr val="3A2B78"/>
                     </a:solidFill>
                   </a:tcPr>
                 </a:tc>
@@ -7141,7 +7129,7 @@
                   <a:tcPr marL="91440" marR="91440" marT="45720" marB="45720" anchor="ctr">
                     <a:lnL w="9525" cap="flat" cmpd="sng" algn="ctr">
                       <a:solidFill>
-                        <a:srgbClr val="4A4770"/>
+                        <a:srgbClr val="5A4A9C"/>
                       </a:solidFill>
                       <a:prstDash val="solid"/>
                       <a:round/>
@@ -7150,7 +7138,7 @@
                     </a:lnL>
                     <a:lnR w="9525" cap="flat" cmpd="sng" algn="ctr">
                       <a:solidFill>
-                        <a:srgbClr val="4A4770"/>
+                        <a:srgbClr val="5A4A9C"/>
                       </a:solidFill>
                       <a:prstDash val="solid"/>
                       <a:round/>
@@ -7159,7 +7147,7 @@
                     </a:lnR>
                     <a:lnT w="9525" cap="flat" cmpd="sng" algn="ctr">
                       <a:solidFill>
-                        <a:srgbClr val="4A4770"/>
+                        <a:srgbClr val="5A4A9C"/>
                       </a:solidFill>
                       <a:prstDash val="solid"/>
                       <a:round/>
@@ -7168,7 +7156,7 @@
                     </a:lnT>
                     <a:lnB w="9525" cap="flat" cmpd="sng" algn="ctr">
                       <a:solidFill>
-                        <a:srgbClr val="4A4770"/>
+                        <a:srgbClr val="5A4A9C"/>
                       </a:solidFill>
                       <a:prstDash val="solid"/>
                       <a:round/>
@@ -7176,7 +7164,7 @@
                       <a:tailEnd type="none" w="med" len="med"/>
                     </a:lnB>
                     <a:solidFill>
-                      <a:srgbClr val="2C2A4A"/>
+                      <a:srgbClr val="3A2B78"/>
                     </a:solidFill>
                   </a:tcPr>
                 </a:tc>
@@ -7211,7 +7199,7 @@
                   <a:tcPr marL="91440" marR="91440" marT="45720" marB="45720" anchor="ctr">
                     <a:lnL w="9525" cap="flat" cmpd="sng" algn="ctr">
                       <a:solidFill>
-                        <a:srgbClr val="4A4770"/>
+                        <a:srgbClr val="5A4A9C"/>
                       </a:solidFill>
                       <a:prstDash val="solid"/>
                       <a:round/>
@@ -7220,7 +7208,7 @@
                     </a:lnL>
                     <a:lnR w="9525" cap="flat" cmpd="sng" algn="ctr">
                       <a:solidFill>
-                        <a:srgbClr val="4A4770"/>
+                        <a:srgbClr val="5A4A9C"/>
                       </a:solidFill>
                       <a:prstDash val="solid"/>
                       <a:round/>
@@ -7229,7 +7217,7 @@
                     </a:lnR>
                     <a:lnT w="9525" cap="flat" cmpd="sng" algn="ctr">
                       <a:solidFill>
-                        <a:srgbClr val="4A4770"/>
+                        <a:srgbClr val="5A4A9C"/>
                       </a:solidFill>
                       <a:prstDash val="solid"/>
                       <a:round/>
@@ -7238,7 +7226,7 @@
                     </a:lnT>
                     <a:lnB w="9525" cap="flat" cmpd="sng" algn="ctr">
                       <a:solidFill>
-                        <a:srgbClr val="4A4770"/>
+                        <a:srgbClr val="5A4A9C"/>
                       </a:solidFill>
                       <a:prstDash val="solid"/>
                       <a:round/>
@@ -7246,7 +7234,7 @@
                       <a:tailEnd type="none" w="med" len="med"/>
                     </a:lnB>
                     <a:solidFill>
-                      <a:srgbClr val="2C2A4A"/>
+                      <a:srgbClr val="3A2B78"/>
                     </a:solidFill>
                   </a:tcPr>
                 </a:tc>
@@ -7279,7 +7267,7 @@
                   <a:tcPr marL="91440" marR="91440" marT="45720" marB="45720" anchor="ctr">
                     <a:lnL w="9525" cap="flat" cmpd="sng" algn="ctr">
                       <a:solidFill>
-                        <a:srgbClr val="4A4770"/>
+                        <a:srgbClr val="5A4A9C"/>
                       </a:solidFill>
                       <a:prstDash val="solid"/>
                       <a:round/>
@@ -7288,7 +7276,7 @@
                     </a:lnL>
                     <a:lnR w="9525" cap="flat" cmpd="sng" algn="ctr">
                       <a:solidFill>
-                        <a:srgbClr val="4A4770"/>
+                        <a:srgbClr val="5A4A9C"/>
                       </a:solidFill>
                       <a:prstDash val="solid"/>
                       <a:round/>
@@ -7297,7 +7285,7 @@
                     </a:lnR>
                     <a:lnT w="9525" cap="flat" cmpd="sng" algn="ctr">
                       <a:solidFill>
-                        <a:srgbClr val="4A4770"/>
+                        <a:srgbClr val="5A4A9C"/>
                       </a:solidFill>
                       <a:prstDash val="solid"/>
                       <a:round/>
@@ -7306,7 +7294,7 @@
                     </a:lnT>
                     <a:lnB w="9525" cap="flat" cmpd="sng" algn="ctr">
                       <a:solidFill>
-                        <a:srgbClr val="4A4770"/>
+                        <a:srgbClr val="5A4A9C"/>
                       </a:solidFill>
                       <a:prstDash val="solid"/>
                       <a:round/>
@@ -7314,7 +7302,7 @@
                       <a:tailEnd type="none" w="med" len="med"/>
                     </a:lnB>
                     <a:solidFill>
-                      <a:srgbClr val="2C2A4A"/>
+                      <a:srgbClr val="3A2B78"/>
                     </a:solidFill>
                   </a:tcPr>
                 </a:tc>
@@ -7347,7 +7335,7 @@
                   <a:tcPr marL="91440" marR="91440" marT="45720" marB="45720" anchor="ctr">
                     <a:lnL w="9525" cap="flat" cmpd="sng" algn="ctr">
                       <a:solidFill>
-                        <a:srgbClr val="4A4770"/>
+                        <a:srgbClr val="5A4A9C"/>
                       </a:solidFill>
                       <a:prstDash val="solid"/>
                       <a:round/>
@@ -7356,7 +7344,7 @@
                     </a:lnL>
                     <a:lnR w="9525" cap="flat" cmpd="sng" algn="ctr">
                       <a:solidFill>
-                        <a:srgbClr val="4A4770"/>
+                        <a:srgbClr val="5A4A9C"/>
                       </a:solidFill>
                       <a:prstDash val="solid"/>
                       <a:round/>
@@ -7365,7 +7353,7 @@
                     </a:lnR>
                     <a:lnT w="9525" cap="flat" cmpd="sng" algn="ctr">
                       <a:solidFill>
-                        <a:srgbClr val="4A4770"/>
+                        <a:srgbClr val="5A4A9C"/>
                       </a:solidFill>
                       <a:prstDash val="solid"/>
                       <a:round/>
@@ -7374,7 +7362,7 @@
                     </a:lnT>
                     <a:lnB w="9525" cap="flat" cmpd="sng" algn="ctr">
                       <a:solidFill>
-                        <a:srgbClr val="4A4770"/>
+                        <a:srgbClr val="5A4A9C"/>
                       </a:solidFill>
                       <a:prstDash val="solid"/>
                       <a:round/>
@@ -7382,7 +7370,7 @@
                       <a:tailEnd type="none" w="med" len="med"/>
                     </a:lnB>
                     <a:solidFill>
-                      <a:srgbClr val="2C2A4A"/>
+                      <a:srgbClr val="3A2B78"/>
                     </a:solidFill>
                   </a:tcPr>
                 </a:tc>
@@ -7417,7 +7405,7 @@
                   <a:tcPr marL="91440" marR="91440" marT="45720" marB="45720" anchor="ctr">
                     <a:lnL w="9525" cap="flat" cmpd="sng" algn="ctr">
                       <a:solidFill>
-                        <a:srgbClr val="4A4770"/>
+                        <a:srgbClr val="5A4A9C"/>
                       </a:solidFill>
                       <a:prstDash val="solid"/>
                       <a:round/>
@@ -7426,7 +7414,7 @@
                     </a:lnL>
                     <a:lnR w="9525" cap="flat" cmpd="sng" algn="ctr">
                       <a:solidFill>
-                        <a:srgbClr val="4A4770"/>
+                        <a:srgbClr val="5A4A9C"/>
                       </a:solidFill>
                       <a:prstDash val="solid"/>
                       <a:round/>
@@ -7435,7 +7423,7 @@
                     </a:lnR>
                     <a:lnT w="9525" cap="flat" cmpd="sng" algn="ctr">
                       <a:solidFill>
-                        <a:srgbClr val="4A4770"/>
+                        <a:srgbClr val="5A4A9C"/>
                       </a:solidFill>
                       <a:prstDash val="solid"/>
                       <a:round/>
@@ -7444,7 +7432,7 @@
                     </a:lnT>
                     <a:lnB w="9525" cap="flat" cmpd="sng" algn="ctr">
                       <a:solidFill>
-                        <a:srgbClr val="4A4770"/>
+                        <a:srgbClr val="5A4A9C"/>
                       </a:solidFill>
                       <a:prstDash val="solid"/>
                       <a:round/>
@@ -7452,7 +7440,7 @@
                       <a:tailEnd type="none" w="med" len="med"/>
                     </a:lnB>
                     <a:solidFill>
-                      <a:srgbClr val="2C2A4A"/>
+                      <a:srgbClr val="3A2B78"/>
                     </a:solidFill>
                   </a:tcPr>
                 </a:tc>
@@ -7485,7 +7473,7 @@
                   <a:tcPr marL="91440" marR="91440" marT="45720" marB="45720" anchor="ctr">
                     <a:lnL w="9525" cap="flat" cmpd="sng" algn="ctr">
                       <a:solidFill>
-                        <a:srgbClr val="4A4770"/>
+                        <a:srgbClr val="5A4A9C"/>
                       </a:solidFill>
                       <a:prstDash val="solid"/>
                       <a:round/>
@@ -7494,7 +7482,7 @@
                     </a:lnL>
                     <a:lnR w="9525" cap="flat" cmpd="sng" algn="ctr">
                       <a:solidFill>
-                        <a:srgbClr val="4A4770"/>
+                        <a:srgbClr val="5A4A9C"/>
                       </a:solidFill>
                       <a:prstDash val="solid"/>
                       <a:round/>
@@ -7503,7 +7491,7 @@
                     </a:lnR>
                     <a:lnT w="9525" cap="flat" cmpd="sng" algn="ctr">
                       <a:solidFill>
-                        <a:srgbClr val="4A4770"/>
+                        <a:srgbClr val="5A4A9C"/>
                       </a:solidFill>
                       <a:prstDash val="solid"/>
                       <a:round/>
@@ -7512,7 +7500,7 @@
                     </a:lnT>
                     <a:lnB w="9525" cap="flat" cmpd="sng" algn="ctr">
                       <a:solidFill>
-                        <a:srgbClr val="4A4770"/>
+                        <a:srgbClr val="5A4A9C"/>
                       </a:solidFill>
                       <a:prstDash val="solid"/>
                       <a:round/>
@@ -7520,7 +7508,7 @@
                       <a:tailEnd type="none" w="med" len="med"/>
                     </a:lnB>
                     <a:solidFill>
-                      <a:srgbClr val="2C2A4A"/>
+                      <a:srgbClr val="3A2B78"/>
                     </a:solidFill>
                   </a:tcPr>
                 </a:tc>
@@ -7553,7 +7541,7 @@
                   <a:tcPr marL="91440" marR="91440" marT="45720" marB="45720" anchor="ctr">
                     <a:lnL w="9525" cap="flat" cmpd="sng" algn="ctr">
                       <a:solidFill>
-                        <a:srgbClr val="4A4770"/>
+                        <a:srgbClr val="5A4A9C"/>
                       </a:solidFill>
                       <a:prstDash val="solid"/>
                       <a:round/>
@@ -7562,7 +7550,7 @@
                     </a:lnL>
                     <a:lnR w="9525" cap="flat" cmpd="sng" algn="ctr">
                       <a:solidFill>
-                        <a:srgbClr val="4A4770"/>
+                        <a:srgbClr val="5A4A9C"/>
                       </a:solidFill>
                       <a:prstDash val="solid"/>
                       <a:round/>
@@ -7571,7 +7559,7 @@
                     </a:lnR>
                     <a:lnT w="9525" cap="flat" cmpd="sng" algn="ctr">
                       <a:solidFill>
-                        <a:srgbClr val="4A4770"/>
+                        <a:srgbClr val="5A4A9C"/>
                       </a:solidFill>
                       <a:prstDash val="solid"/>
                       <a:round/>
@@ -7580,7 +7568,7 @@
                     </a:lnT>
                     <a:lnB w="9525" cap="flat" cmpd="sng" algn="ctr">
                       <a:solidFill>
-                        <a:srgbClr val="4A4770"/>
+                        <a:srgbClr val="5A4A9C"/>
                       </a:solidFill>
                       <a:prstDash val="solid"/>
                       <a:round/>
@@ -7588,7 +7576,7 @@
                       <a:tailEnd type="none" w="med" len="med"/>
                     </a:lnB>
                     <a:solidFill>
-                      <a:srgbClr val="2C2A4A"/>
+                      <a:srgbClr val="3A2B78"/>
                     </a:solidFill>
                   </a:tcPr>
                 </a:tc>
@@ -9604,7 +9592,7 @@
     <p:bg>
       <p:bgPr>
         <a:solidFill>
-          <a:srgbClr val="1B1A33"/>
+          <a:srgbClr val="281C5C"/>
         </a:solidFill>
       </p:bgPr>
     </p:bg>
@@ -9870,7 +9858,7 @@
           <a:noFill/>
           <a:ln w="19050">
             <a:solidFill>
-              <a:srgbClr val="4A4770"/>
+              <a:srgbClr val="5A4A9C"/>
             </a:solidFill>
             <a:prstDash val="dash"/>
           </a:ln>
@@ -10035,7 +10023,7 @@
           <a:noFill/>
           <a:ln w="19050">
             <a:solidFill>
-              <a:srgbClr val="4A4770"/>
+              <a:srgbClr val="5A4A9C"/>
             </a:solidFill>
             <a:prstDash val="dash"/>
           </a:ln>
@@ -10200,7 +10188,7 @@
           <a:noFill/>
           <a:ln w="19050">
             <a:solidFill>
-              <a:srgbClr val="4A4770"/>
+              <a:srgbClr val="5A4A9C"/>
             </a:solidFill>
             <a:prstDash val="dash"/>
           </a:ln>
@@ -10441,11 +10429,11 @@
             <a:avLst/>
           </a:prstGeom>
           <a:solidFill>
-            <a:srgbClr val="2C2A4A"/>
+            <a:srgbClr val="3A2B78"/>
           </a:solidFill>
           <a:ln w="12700">
             <a:solidFill>
-              <a:srgbClr val="2C2A4A"/>
+              <a:srgbClr val="3A2B78"/>
             </a:solidFill>
             <a:prstDash val="solid"/>
           </a:ln>
@@ -12434,11 +12422,11 @@
             <a:avLst/>
           </a:prstGeom>
           <a:solidFill>
-            <a:srgbClr val="1B1A33"/>
+            <a:srgbClr val="281C5C"/>
           </a:solidFill>
           <a:ln w="12700">
             <a:solidFill>
-              <a:srgbClr val="1B1A33"/>
+              <a:srgbClr val="281C5C"/>
             </a:solidFill>
             <a:prstDash val="solid"/>
           </a:ln>
